--- a/Topic_B/Exam_Practice/TB-L01_Writing_Workshop_Identity_and_Personal_Profiles.pptx
+++ b/Topic_B/Exam_Practice/TB-L01_Writing_Workshop_Identity_and_Personal_Profiles.pptx
@@ -784,7 +784,11 @@
           <a:lstStyle/>
           <a:p>
             <a:r>
-              <a:rPr lang="en-US" dirty="0"/>
+              <a:rPr lang="ar-SA" dirty="0">
+                <a:latin typeface="Amiri" pitchFamily="2" charset="-78"/>
+                <a:ea typeface="Amiri" pitchFamily="2" charset="-78"/>
+                <a:cs typeface="Amiri" pitchFamily="2" charset="-78"/>
+              </a:rPr>
               <a:t>Q3 (3 min to choose and read). Title (أ) suits Core and Develop; title (ب) suits Stretch.</a:t>
             </a:r>
             <a:endParaRPr lang="en-US" dirty="0"/>
@@ -1403,7 +1407,11 @@
           <a:lstStyle/>
           <a:p>
             <a:r>
-              <a:rPr lang="en-US" dirty="0"/>
+              <a:rPr lang="ar-SA" dirty="0">
+                <a:latin typeface="Amiri" pitchFamily="2" charset="-78"/>
+                <a:ea typeface="Amiri" pitchFamily="2" charset="-78"/>
+                <a:cs typeface="Amiri" pitchFamily="2" charset="-78"/>
+              </a:rPr>
               <a:t>WELCOME (1 min) — while students join.
 • Greet each student by name as they arrive: السَّلَامُ عَلَيْكُمْ. Take the register (Pastoral Tracker: attendance 0/1).
 • 2-MINUTE CHECK-IN (SEND training): a private chat to any student who seemed unsettled last lesson — “Are you okay today? 👍 / 👎”.
@@ -1936,7 +1944,11 @@
           <a:lstStyle/>
           <a:p>
             <a:r>
-              <a:rPr lang="en-US" dirty="0"/>
+              <a:rPr lang="ar-SA" dirty="0">
+                <a:latin typeface="Amiri" pitchFamily="2" charset="-78"/>
+                <a:ea typeface="Amiri" pitchFamily="2" charset="-78"/>
+                <a:cs typeface="Amiri" pitchFamily="2" charset="-78"/>
+              </a:rPr>
               <a:t>Question words: مَا (what) · كَمْ (how many) · مَتَى (when) · أَيْنَ (where) · أَيَّ (which) · صِفِي (describe) — bullet 4 ends with a FUTURE plan.</a:t>
             </a:r>
             <a:endParaRPr lang="en-US" dirty="0"/>
@@ -2508,6 +2520,7 @@
                   <a:srgbClr val="D4AF37"/>
                 </a:solidFill>
                 <a:latin typeface="Amiri" pitchFamily="2" charset="-78"/>
+                <a:ea typeface="Amiri" pitchFamily="2" charset="-78"/>
                 <a:cs typeface="Amiri" pitchFamily="2" charset="-78"/>
               </a:rPr>
               <a:t>م</a:t>
@@ -2714,6 +2727,7 @@
                   <a:srgbClr val="D4AF37"/>
                 </a:solidFill>
                 <a:latin typeface="Amiri" pitchFamily="2" charset="-78"/>
+                <a:ea typeface="Amiri" pitchFamily="2" charset="-78"/>
                 <a:cs typeface="Amiri" pitchFamily="2" charset="-78"/>
               </a:rPr>
               <a:t>وَرْشَةُ الكِتَابَةِ — الهُوِيَّةُ</a:t>
@@ -3171,6 +3185,7 @@
                   <a:srgbClr val="D4AF37"/>
                 </a:solidFill>
                 <a:latin typeface="Amiri" pitchFamily="2" charset="-78"/>
+                <a:ea typeface="Amiri" pitchFamily="2" charset="-78"/>
                 <a:cs typeface="Amiri" pitchFamily="2" charset="-78"/>
               </a:rPr>
               <a:t>م</a:t>
@@ -3491,6 +3506,7 @@
                   <a:srgbClr val="8A6D1E"/>
                 </a:solidFill>
                 <a:latin typeface="Amiri" pitchFamily="2" charset="-78"/>
+                <a:ea typeface="Amiri" pitchFamily="2" charset="-78"/>
                 <a:cs typeface="Amiri" pitchFamily="2" charset="-78"/>
               </a:rPr>
               <a:t>نَمُوذَجُ الإِجَابَةِ</a:t>
@@ -3604,6 +3620,7 @@
                   <a:srgbClr val="1F2A37"/>
                 </a:solidFill>
                 <a:latin typeface="Amiri" pitchFamily="2" charset="-78"/>
+                <a:ea typeface="Amiri" pitchFamily="2" charset="-78"/>
                 <a:cs typeface="Amiri" pitchFamily="2" charset="-78"/>
               </a:rPr>
               <a:t>مَرْحَبًا يَا سَارَةُ،</a:t>
@@ -3623,6 +3640,7 @@
                   <a:srgbClr val="1F2A37"/>
                 </a:solidFill>
                 <a:latin typeface="Amiri" pitchFamily="2" charset="-78"/>
+                <a:ea typeface="Amiri" pitchFamily="2" charset="-78"/>
                 <a:cs typeface="Amiri" pitchFamily="2" charset="-78"/>
               </a:rPr>
               <a:t>أَنَا صَدِيقَتُكِ الجَدِيدَةُ مِنْ بِرِيطَانِيَا. اسْمِي مَرْيَمُ، وَعُمْرِي خَمْسَ عَشْرَةَ سَنَةً. عِيدُ مِيلَادِي فِي الخَامِسِ مِنْ يُونْيُو. أَسْكُنُ فِي مَدِينَةِ لِيسْتَرَ مَعَ أُسْرَتِي. أَنَا بِرِيطَانِيَّةٌ، وَأَصْلِي مِنَ الصُّومَالِ. أَتَكَلَّمُ الإِنْجِلِيزِيَّةَ وَالصُّومَالِيَّةَ، وَأَتَعَلَّمُ العَرَبِيَّةَ فِي المَدْرَسَةِ. أَنَا طَالِبَةٌ مَرِحَةٌ وَنَشِيطَةٌ، وَأُحِبُّ القِرَاءَةَ. فِي المُسْتَقْبَلِ سَأَزُورُكِ فِي عَمَّانَ. وَأَنْتِ، كَمْ عُمْرُكِ؟</a:t>
@@ -3642,6 +3660,7 @@
                   <a:srgbClr val="1F2A37"/>
                 </a:solidFill>
                 <a:latin typeface="Amiri" pitchFamily="2" charset="-78"/>
+                <a:ea typeface="Amiri" pitchFamily="2" charset="-78"/>
                 <a:cs typeface="Amiri" pitchFamily="2" charset="-78"/>
               </a:rPr>
               <a:t>مَعَ السَّلَامَةِ،</a:t>
@@ -3661,6 +3680,7 @@
                   <a:srgbClr val="1F2A37"/>
                 </a:solidFill>
                 <a:latin typeface="Amiri" pitchFamily="2" charset="-78"/>
+                <a:ea typeface="Amiri" pitchFamily="2" charset="-78"/>
                 <a:cs typeface="Amiri" pitchFamily="2" charset="-78"/>
               </a:rPr>
               <a:t>مَرْيَمُ</a:t>
@@ -3824,11 +3844,12 @@
               <a:buNone/>
             </a:pPr>
             <a:r>
-              <a:rPr lang="en-US" sz="950" b="1" dirty="0">
+              <a:rPr lang="ar-SA" sz="950" b="1" dirty="0">
                 <a:solidFill>
                   <a:srgbClr val="FFFFFF"/>
                 </a:solidFill>
                 <a:latin typeface="Calibri" pitchFamily="34" charset="0"/>
+                <a:ea typeface="Amiri" pitchFamily="2" charset="-78"/>
                 <a:cs typeface="Amiri" pitchFamily="2" charset="-78"/>
               </a:rPr>
               <a:t>عُمْرِي خَمْسَ عَشْرَةَ سَنَةً</a:t>
@@ -3889,11 +3910,12 @@
               <a:buNone/>
             </a:pPr>
             <a:r>
-              <a:rPr lang="en-US" sz="950" b="1" dirty="0">
+              <a:rPr lang="ar-SA" sz="950" b="1" dirty="0">
                 <a:solidFill>
                   <a:srgbClr val="FFFFFF"/>
                 </a:solidFill>
                 <a:latin typeface="Calibri" pitchFamily="34" charset="0"/>
+                <a:ea typeface="Amiri" pitchFamily="2" charset="-78"/>
                 <a:cs typeface="Amiri" pitchFamily="2" charset="-78"/>
               </a:rPr>
               <a:t>أَنَا بِرِيطَانِيَّةٌ</a:t>
@@ -3954,11 +3976,12 @@
               <a:buNone/>
             </a:pPr>
             <a:r>
-              <a:rPr lang="en-US" sz="950" b="1" dirty="0">
+              <a:rPr lang="ar-SA" sz="950" b="1" dirty="0">
                 <a:solidFill>
                   <a:srgbClr val="FFFFFF"/>
                 </a:solidFill>
                 <a:latin typeface="Calibri" pitchFamily="34" charset="0"/>
+                <a:ea typeface="Amiri" pitchFamily="2" charset="-78"/>
                 <a:cs typeface="Amiri" pitchFamily="2" charset="-78"/>
               </a:rPr>
               <a:t>أَتَكَلَّمُ</a:t>
@@ -4019,11 +4042,12 @@
               <a:buNone/>
             </a:pPr>
             <a:r>
-              <a:rPr lang="en-US" sz="950" b="1" dirty="0">
+              <a:rPr lang="ar-SA" sz="950" b="1" dirty="0">
                 <a:solidFill>
                   <a:srgbClr val="FFFFFF"/>
                 </a:solidFill>
                 <a:latin typeface="Calibri" pitchFamily="34" charset="0"/>
+                <a:ea typeface="Amiri" pitchFamily="2" charset="-78"/>
                 <a:cs typeface="Amiri" pitchFamily="2" charset="-78"/>
               </a:rPr>
               <a:t>سَأَزُورُكِ</a:t>
@@ -4157,6 +4181,7 @@
                   <a:srgbClr val="D4AF37"/>
                 </a:solidFill>
                 <a:latin typeface="Amiri" pitchFamily="2" charset="-78"/>
+                <a:ea typeface="Amiri" pitchFamily="2" charset="-78"/>
                 <a:cs typeface="Amiri" pitchFamily="2" charset="-78"/>
               </a:rPr>
               <a:t>م</a:t>
@@ -4477,6 +4502,7 @@
                   <a:srgbClr val="8A6D1E"/>
                 </a:solidFill>
                 <a:latin typeface="Amiri" pitchFamily="2" charset="-78"/>
+                <a:ea typeface="Amiri" pitchFamily="2" charset="-78"/>
                 <a:cs typeface="Amiri" pitchFamily="2" charset="-78"/>
               </a:rPr>
               <a:t>نَمُوذَجُ الإِجَابَةِ</a:t>
@@ -4590,6 +4616,7 @@
                   <a:srgbClr val="1F2A37"/>
                 </a:solidFill>
                 <a:latin typeface="Amiri" pitchFamily="2" charset="-78"/>
+                <a:ea typeface="Amiri" pitchFamily="2" charset="-78"/>
                 <a:cs typeface="Amiri" pitchFamily="2" charset="-78"/>
               </a:rPr>
               <a:t>عَزِيزَتِي سَارَةُ،</a:t>
@@ -4609,6 +4636,7 @@
                   <a:srgbClr val="1F2A37"/>
                 </a:solidFill>
                 <a:latin typeface="Amiri" pitchFamily="2" charset="-78"/>
+                <a:ea typeface="Amiri" pitchFamily="2" charset="-78"/>
                 <a:cs typeface="Amiri" pitchFamily="2" charset="-78"/>
               </a:rPr>
               <a:t>تَحِيَّةً طَيِّبَةً، وَبَعْدُ، فَأَنَا سَعِيدَةٌ جِدًّا لِأَنَّنَا سَنَكُونُ صَدِيقَتَيْنِ بِالمُرَاسَلَةِ. اسْمِي مَرْيَمُ، وَعُمْرِي خَمْسَ عَشْرَةَ سَنَةً، وَأَسْكُنُ مَعَ وَالِدَيَّ وَأَخَوَيَّ فِي لِيسْتَرَ، وَهِيَ مَدِينَةٌ مُتَنَوِّعَةٌ فِي وَسَطِ إِنْجِلْتِرَا. وُلِدْتُ فِي مُقَدِيشُو، وَجِئْنَا إِلَى بِرِيطَانِيَا عِنْدَمَا كَانَ عُمْرِي ثَلَاثَ سَنَوَاتٍ، لِذٰلِكَ أَشْعُرُ أَنِّي بِرِيطَانِيَّةٌ وَصُومَالِيَّةٌ مَعًا. أَتَكَلَّمُ الإِنْجِلِيزِيَّةَ بِطَلَاقَةٍ، وَالصُّومَالِيَّةَ فِي البَيْتِ، وَبَدَأْتُ أَتَعَلَّمُ العَرَبِيَّةَ قَبْلَ سَنَتَيْنِ. يَقُولُ أَصْدِقَائِي إِنِّي مَرِحَةٌ وَصَبُورَةٌ، وَأُحِبُّ القِرَاءَةَ وَالسِّبَاحَةَ. إِذَا زُرْتُ الأُرْدُنَّ فِي الصَّيْفِ، فَسَأَتَّصِلُ بِكِ لِنَلْتَقِيَ. حَدِّثِينِي عَنْ نَفْسِكِ!</a:t>
@@ -4628,6 +4656,7 @@
                   <a:srgbClr val="1F2A37"/>
                 </a:solidFill>
                 <a:latin typeface="Amiri" pitchFamily="2" charset="-78"/>
+                <a:ea typeface="Amiri" pitchFamily="2" charset="-78"/>
                 <a:cs typeface="Amiri" pitchFamily="2" charset="-78"/>
               </a:rPr>
               <a:t>مَعَ مَحَبَّتِي،</a:t>
@@ -4647,6 +4676,7 @@
                   <a:srgbClr val="1F2A37"/>
                 </a:solidFill>
                 <a:latin typeface="Amiri" pitchFamily="2" charset="-78"/>
+                <a:ea typeface="Amiri" pitchFamily="2" charset="-78"/>
                 <a:cs typeface="Amiri" pitchFamily="2" charset="-78"/>
               </a:rPr>
               <a:t>مَرْيَمُ</a:t>
@@ -4810,11 +4840,12 @@
               <a:buNone/>
             </a:pPr>
             <a:r>
-              <a:rPr lang="en-US" sz="950" b="1" dirty="0">
+              <a:rPr lang="ar-SA" sz="950" b="1" dirty="0">
                 <a:solidFill>
                   <a:srgbClr val="FFFFFF"/>
                 </a:solidFill>
                 <a:latin typeface="Calibri" pitchFamily="34" charset="0"/>
+                <a:ea typeface="Amiri" pitchFamily="2" charset="-78"/>
                 <a:cs typeface="Amiri" pitchFamily="2" charset="-78"/>
               </a:rPr>
               <a:t>وَالِدَيَّ وَأَخَوَيَّ</a:t>
@@ -4875,11 +4906,12 @@
               <a:buNone/>
             </a:pPr>
             <a:r>
-              <a:rPr lang="en-US" sz="950" b="1" dirty="0">
+              <a:rPr lang="ar-SA" sz="950" b="1" dirty="0">
                 <a:solidFill>
                   <a:srgbClr val="FFFFFF"/>
                 </a:solidFill>
                 <a:latin typeface="Calibri" pitchFamily="34" charset="0"/>
+                <a:ea typeface="Amiri" pitchFamily="2" charset="-78"/>
                 <a:cs typeface="Amiri" pitchFamily="2" charset="-78"/>
               </a:rPr>
               <a:t>وَجِئْنَا … عِنْدَمَا</a:t>
@@ -4940,11 +4972,12 @@
               <a:buNone/>
             </a:pPr>
             <a:r>
-              <a:rPr lang="en-US" sz="950" b="1" dirty="0">
+              <a:rPr lang="ar-SA" sz="950" b="1" dirty="0">
                 <a:solidFill>
                   <a:srgbClr val="FFFFFF"/>
                 </a:solidFill>
                 <a:latin typeface="Calibri" pitchFamily="34" charset="0"/>
+                <a:ea typeface="Amiri" pitchFamily="2" charset="-78"/>
                 <a:cs typeface="Amiri" pitchFamily="2" charset="-78"/>
               </a:rPr>
               <a:t>أَشْعُرُ أَنِّي</a:t>
@@ -5005,11 +5038,12 @@
               <a:buNone/>
             </a:pPr>
             <a:r>
-              <a:rPr lang="en-US" sz="950" b="1" dirty="0">
+              <a:rPr lang="ar-SA" sz="950" b="1" dirty="0">
                 <a:solidFill>
                   <a:srgbClr val="FFFFFF"/>
                 </a:solidFill>
                 <a:latin typeface="Calibri" pitchFamily="34" charset="0"/>
+                <a:ea typeface="Amiri" pitchFamily="2" charset="-78"/>
                 <a:cs typeface="Amiri" pitchFamily="2" charset="-78"/>
               </a:rPr>
               <a:t>إِذَا زُرْتُ … فَسَأَتَّصِلُ</a:t>
@@ -5143,6 +5177,7 @@
                   <a:srgbClr val="D4AF37"/>
                 </a:solidFill>
                 <a:latin typeface="Amiri" pitchFamily="2" charset="-78"/>
+                <a:ea typeface="Amiri" pitchFamily="2" charset="-78"/>
                 <a:cs typeface="Amiri" pitchFamily="2" charset="-78"/>
               </a:rPr>
               <a:t>م</a:t>
@@ -5463,6 +5498,7 @@
                   <a:srgbClr val="8A6D1E"/>
                 </a:solidFill>
                 <a:latin typeface="Amiri" pitchFamily="2" charset="-78"/>
+                <a:ea typeface="Amiri" pitchFamily="2" charset="-78"/>
                 <a:cs typeface="Amiri" pitchFamily="2" charset="-78"/>
               </a:rPr>
               <a:t>اخْتَرْ عُنْوَانًا وَاحِدًا</a:t>
@@ -5743,6 +5779,7 @@
                   <a:srgbClr val="1B3B6F"/>
                 </a:solidFill>
                 <a:latin typeface="Amiri" pitchFamily="2" charset="-78"/>
+                <a:ea typeface="Amiri" pitchFamily="2" charset="-78"/>
                 <a:cs typeface="Amiri" pitchFamily="2" charset="-78"/>
               </a:rPr>
               <a:t>مَنْ أَنَا؟</a:t>
@@ -5781,6 +5818,7 @@
                   <a:srgbClr val="1B3B6F"/>
                 </a:solidFill>
                 <a:latin typeface="Amiri" pitchFamily="2" charset="-78"/>
+                <a:ea typeface="Amiri" pitchFamily="2" charset="-78"/>
                 <a:cs typeface="Amiri" pitchFamily="2" charset="-78"/>
               </a:rPr>
               <a:t>(أ)</a:t>
@@ -5887,6 +5925,7 @@
                   <a:srgbClr val="1B3B6F"/>
                 </a:solidFill>
                 <a:latin typeface="Amiri" pitchFamily="2" charset="-78"/>
+                <a:ea typeface="Amiri" pitchFamily="2" charset="-78"/>
                 <a:cs typeface="Amiri" pitchFamily="2" charset="-78"/>
               </a:rPr>
               <a:t>مَعْلُومَاتُكَ الشَّخْصِيَّةُ · أَصْلُكَ وَلُغَاتُكَ · ذِكْرَى أَوْ حَدَثٌ مُهِمٌّ فِي حَيَاتِكَ · شَخْصِيَّتُكَ وَأَحْلَامُكَ</a:t>
@@ -6018,6 +6057,7 @@
                   <a:srgbClr val="1B3B6F"/>
                 </a:solidFill>
                 <a:latin typeface="Amiri" pitchFamily="2" charset="-78"/>
+                <a:ea typeface="Amiri" pitchFamily="2" charset="-78"/>
                 <a:cs typeface="Amiri" pitchFamily="2" charset="-78"/>
               </a:rPr>
               <a:t>الشَّبَابُ بَيْنَ ثَقَافَتَيْنِ</a:t>
@@ -6056,6 +6096,7 @@
                   <a:srgbClr val="1B3B6F"/>
                 </a:solidFill>
                 <a:latin typeface="Amiri" pitchFamily="2" charset="-78"/>
+                <a:ea typeface="Amiri" pitchFamily="2" charset="-78"/>
                 <a:cs typeface="Amiri" pitchFamily="2" charset="-78"/>
               </a:rPr>
               <a:t>(ب)</a:t>
@@ -6162,6 +6203,7 @@
                   <a:srgbClr val="1B3B6F"/>
                 </a:solidFill>
                 <a:latin typeface="Amiri" pitchFamily="2" charset="-78"/>
+                <a:ea typeface="Amiri" pitchFamily="2" charset="-78"/>
                 <a:cs typeface="Amiri" pitchFamily="2" charset="-78"/>
               </a:rPr>
               <a:t>كَيْفَ يَعِيشُ الشَّبَابُ بَيْنَ ثَقَافَتَيْنِ؟ · المَاضِي وَالحَاضِرُ · تَجْرِبَةٌ شَخْصِيَّةٌ · رَأْيُكَ وَاقْتِرَاحُكَ</a:t>
@@ -6361,6 +6403,7 @@
                   <a:srgbClr val="D4AF37"/>
                 </a:solidFill>
                 <a:latin typeface="Amiri" pitchFamily="2" charset="-78"/>
+                <a:ea typeface="Amiri" pitchFamily="2" charset="-78"/>
                 <a:cs typeface="Amiri" pitchFamily="2" charset="-78"/>
               </a:rPr>
               <a:t>م</a:t>
@@ -6681,6 +6724,7 @@
                   <a:srgbClr val="8A6D1E"/>
                 </a:solidFill>
                 <a:latin typeface="Amiri" pitchFamily="2" charset="-78"/>
+                <a:ea typeface="Amiri" pitchFamily="2" charset="-78"/>
                 <a:cs typeface="Amiri" pitchFamily="2" charset="-78"/>
               </a:rPr>
               <a:t>خُطَّةُ الكِتَابَةِ</a:t>
@@ -7305,6 +7349,7 @@
                   <a:srgbClr val="1B3B6F"/>
                 </a:solidFill>
                 <a:latin typeface="Amiri" pitchFamily="2" charset="-78"/>
+                <a:ea typeface="Amiri" pitchFamily="2" charset="-78"/>
                 <a:cs typeface="Amiri" pitchFamily="2" charset="-78"/>
               </a:rPr>
               <a:t>أَنَا طَالِبٌ فِي السَّنَةِ الحَادِيَةَ عَشْرَةَ.</a:t>
@@ -7404,6 +7449,7 @@
                   <a:srgbClr val="1B3B6F"/>
                 </a:solidFill>
                 <a:latin typeface="Amiri" pitchFamily="2" charset="-78"/>
+                <a:ea typeface="Amiri" pitchFamily="2" charset="-78"/>
                 <a:cs typeface="Amiri" pitchFamily="2" charset="-78"/>
               </a:rPr>
               <a:t>وُلِدْتُ فِي فَاسَ، وَجِئْنَا إِلَى لَنْدَنَ.</a:t>
@@ -7503,6 +7549,7 @@
                   <a:srgbClr val="1B3B6F"/>
                 </a:solidFill>
                 <a:latin typeface="Amiri" pitchFamily="2" charset="-78"/>
+                <a:ea typeface="Amiri" pitchFamily="2" charset="-78"/>
                 <a:cs typeface="Amiri" pitchFamily="2" charset="-78"/>
               </a:rPr>
               <a:t>سَأَدْرُسُ الهَنْدَسَةَ فِي الجَامِعَةِ.</a:t>
@@ -7664,6 +7711,7 @@
                   <a:srgbClr val="1F2A37"/>
                 </a:solidFill>
                 <a:latin typeface="Amiri" pitchFamily="2" charset="-78"/>
+                <a:ea typeface="Amiri" pitchFamily="2" charset="-78"/>
                 <a:cs typeface="Amiri" pitchFamily="2" charset="-78"/>
               </a:rPr>
               <a:t>أ</a:t>
@@ -7690,6 +7738,7 @@
                   <a:srgbClr val="1F2A37"/>
                 </a:solidFill>
                 <a:latin typeface="Amiri" pitchFamily="2" charset="-78"/>
+                <a:ea typeface="Amiri" pitchFamily="2" charset="-78"/>
                 <a:cs typeface="Amiri" pitchFamily="2" charset="-78"/>
               </a:rPr>
               <a:t>ب</a:t>
@@ -7836,6 +7885,7 @@
                   <a:srgbClr val="D4AF37"/>
                 </a:solidFill>
                 <a:latin typeface="Amiri" pitchFamily="2" charset="-78"/>
+                <a:ea typeface="Amiri" pitchFamily="2" charset="-78"/>
                 <a:cs typeface="Amiri" pitchFamily="2" charset="-78"/>
               </a:rPr>
               <a:t>م</a:t>
@@ -8093,6 +8143,7 @@
                   <a:srgbClr val="8A6D1E"/>
                 </a:solidFill>
                 <a:latin typeface="Amiri" pitchFamily="2" charset="-78"/>
+                <a:ea typeface="Amiri" pitchFamily="2" charset="-78"/>
                 <a:cs typeface="Amiri" pitchFamily="2" charset="-78"/>
               </a:rPr>
               <a:t>أ</a:t>
@@ -8157,6 +8208,7 @@
                   <a:srgbClr val="1B3B6F"/>
                 </a:solidFill>
                 <a:latin typeface="Amiri" pitchFamily="2" charset="-78"/>
+                <a:ea typeface="Amiri" pitchFamily="2" charset="-78"/>
                 <a:cs typeface="Amiri" pitchFamily="2" charset="-78"/>
               </a:rPr>
               <a:t>أ</a:t>
@@ -8208,6 +8260,7 @@
                   <a:srgbClr val="8A6D1E"/>
                 </a:solidFill>
                 <a:latin typeface="Amiri" pitchFamily="2" charset="-78"/>
+                <a:ea typeface="Amiri" pitchFamily="2" charset="-78"/>
                 <a:cs typeface="Amiri" pitchFamily="2" charset="-78"/>
               </a:rPr>
               <a:t>نَمُوذَجُ الإِجَابَةِ</a:t>
@@ -8321,6 +8374,7 @@
                   <a:srgbClr val="1F2A37"/>
                 </a:solidFill>
                 <a:latin typeface="Amiri" pitchFamily="2" charset="-78"/>
+                <a:ea typeface="Amiri" pitchFamily="2" charset="-78"/>
                 <a:cs typeface="Amiri" pitchFamily="2" charset="-78"/>
               </a:rPr>
               <a:t>اسْمِي آدَمُ، وَعُمْرِي سِتَّ عَشْرَةَ سَنَةً. أَنَا طَالِبٌ فِي السَّنَةِ الحَادِيَةَ عَشْرَةَ. أَسْكُنُ فِي لَنْدَنَ مَعَ أَبِي وَأُمِّي وَأُخْتِي الصَّغِيرَةِ. بَيْتُنَا قَرِيبٌ مِنَ المَدْرَسَةِ وَالمَسْجِدِ، فَأَمْشِي إِلَى المَدْرَسَةِ كُلَّ يَوْمٍ.</a:t>
@@ -8340,6 +8394,7 @@
                   <a:srgbClr val="1F2A37"/>
                 </a:solidFill>
                 <a:latin typeface="Amiri" pitchFamily="2" charset="-78"/>
+                <a:ea typeface="Amiri" pitchFamily="2" charset="-78"/>
                 <a:cs typeface="Amiri" pitchFamily="2" charset="-78"/>
               </a:rPr>
               <a:t>أَنَا بِرِيطَانِيٌّ، وَأَصْلِي مِنَ المَغْرِبِ. أَتَكَلَّمُ الإِنْجِلِيزِيَّةَ جَيِّدًا، وَأَتَكَلَّمُ الدَّارِجَةَ مَعَ جَدَّتِي. أَدْرُسُ العَرَبِيَّةَ الفُصْحَى فِي المَدْرَسَةِ، وَهِيَ صَعْبَةٌ لٰكِنَّهَا جَمِيلَةٌ.</a:t>
@@ -8359,6 +8414,7 @@
                   <a:srgbClr val="1F2A37"/>
                 </a:solidFill>
                 <a:latin typeface="Amiri" pitchFamily="2" charset="-78"/>
+                <a:ea typeface="Amiri" pitchFamily="2" charset="-78"/>
                 <a:cs typeface="Amiri" pitchFamily="2" charset="-78"/>
               </a:rPr>
               <a:t>وُلِدْتُ فِي مَدِينَةِ فَاسَ، وَجِئْنَا إِلَى لَنْدَنَ عِنْدَمَا كَانَ عُمْرِي أَرْبَعَ سَنَوَاتٍ. فِي الصَّيْفِ المَاضِي زُرْتُ فَاسَ مَعَ أُسْرَتِي، وَرَأَيْتُ البَيْتَ الَّذِي وُلِدْتُ فِيهِ. كَانَتِ الزِّيَارَةُ رَائِعَةً، وَتَعَرَّفْتُ إِلَى أَوْلَادِ عَمِّي، وَلَعِبْنَا مَعًا فِي الحَدِيقَةِ كُلَّ مَسَاءٍ.</a:t>
@@ -8378,6 +8434,7 @@
                   <a:srgbClr val="1F2A37"/>
                 </a:solidFill>
                 <a:latin typeface="Amiri" pitchFamily="2" charset="-78"/>
+                <a:ea typeface="Amiri" pitchFamily="2" charset="-78"/>
                 <a:cs typeface="Amiri" pitchFamily="2" charset="-78"/>
               </a:rPr>
               <a:t>أَنَا شَخْصٌ هَادِئٌ وَمُجْتَهِدٌ، وَأُحِبُّ كُرَةَ القَدَمِ وَالرَّسْمَ، وَعِنْدِي أَصْدِقَاءُ مِنْ بُلْدَانٍ كَثِيرَةٍ. فِي رَأْيِي، أَنَا مَغْرِبِيٌّ وَبِرِيطَانِيٌّ مَعًا. فِي المُسْتَقْبَلِ سَأَدْرُسُ الهَنْدَسَةَ فِي الجَامِعَةِ، وَسَأَزُورُ المَغْرِبَ كُلَّ سَنَةٍ.</a:t>
@@ -8541,11 +8598,12 @@
               <a:buNone/>
             </a:pPr>
             <a:r>
-              <a:rPr lang="en-US" sz="950" b="1" dirty="0">
+              <a:rPr lang="ar-SA" sz="950" b="1" dirty="0">
                 <a:solidFill>
                   <a:srgbClr val="FFFFFF"/>
                 </a:solidFill>
                 <a:latin typeface="Calibri" pitchFamily="34" charset="0"/>
+                <a:ea typeface="Amiri" pitchFamily="2" charset="-78"/>
                 <a:cs typeface="Amiri" pitchFamily="2" charset="-78"/>
               </a:rPr>
               <a:t>أَنَا طَالِبٌ</a:t>
@@ -8606,11 +8664,12 @@
               <a:buNone/>
             </a:pPr>
             <a:r>
-              <a:rPr lang="en-US" sz="950" b="1" dirty="0">
+              <a:rPr lang="ar-SA" sz="950" b="1" dirty="0">
                 <a:solidFill>
                   <a:srgbClr val="FFFFFF"/>
                 </a:solidFill>
                 <a:latin typeface="Calibri" pitchFamily="34" charset="0"/>
+                <a:ea typeface="Amiri" pitchFamily="2" charset="-78"/>
                 <a:cs typeface="Amiri" pitchFamily="2" charset="-78"/>
               </a:rPr>
               <a:t>أَصْلِي مِنَ المَغْرِبِ</a:t>
@@ -8671,11 +8730,12 @@
               <a:buNone/>
             </a:pPr>
             <a:r>
-              <a:rPr lang="en-US" sz="950" b="1" dirty="0">
+              <a:rPr lang="ar-SA" sz="950" b="1" dirty="0">
                 <a:solidFill>
                   <a:srgbClr val="FFFFFF"/>
                 </a:solidFill>
                 <a:latin typeface="Calibri" pitchFamily="34" charset="0"/>
+                <a:ea typeface="Amiri" pitchFamily="2" charset="-78"/>
                 <a:cs typeface="Amiri" pitchFamily="2" charset="-78"/>
               </a:rPr>
               <a:t>وُلِدْتُ فِي مَدِينَةِ فَاسَ</a:t>
@@ -8736,11 +8796,12 @@
               <a:buNone/>
             </a:pPr>
             <a:r>
-              <a:rPr lang="en-US" sz="950" b="1" dirty="0">
+              <a:rPr lang="ar-SA" sz="950" b="1" dirty="0">
                 <a:solidFill>
                   <a:srgbClr val="FFFFFF"/>
                 </a:solidFill>
                 <a:latin typeface="Calibri" pitchFamily="34" charset="0"/>
+                <a:ea typeface="Amiri" pitchFamily="2" charset="-78"/>
                 <a:cs typeface="Amiri" pitchFamily="2" charset="-78"/>
               </a:rPr>
               <a:t>سَأَدْرُسُ</a:t>
@@ -8874,6 +8935,7 @@
                   <a:srgbClr val="D4AF37"/>
                 </a:solidFill>
                 <a:latin typeface="Amiri" pitchFamily="2" charset="-78"/>
+                <a:ea typeface="Amiri" pitchFamily="2" charset="-78"/>
                 <a:cs typeface="Amiri" pitchFamily="2" charset="-78"/>
               </a:rPr>
               <a:t>م</a:t>
@@ -9131,6 +9193,7 @@
                   <a:srgbClr val="8A6D1E"/>
                 </a:solidFill>
                 <a:latin typeface="Amiri" pitchFamily="2" charset="-78"/>
+                <a:ea typeface="Amiri" pitchFamily="2" charset="-78"/>
                 <a:cs typeface="Amiri" pitchFamily="2" charset="-78"/>
               </a:rPr>
               <a:t>أ</a:t>
@@ -9195,6 +9258,7 @@
                   <a:srgbClr val="1B3B6F"/>
                 </a:solidFill>
                 <a:latin typeface="Amiri" pitchFamily="2" charset="-78"/>
+                <a:ea typeface="Amiri" pitchFamily="2" charset="-78"/>
                 <a:cs typeface="Amiri" pitchFamily="2" charset="-78"/>
               </a:rPr>
               <a:t>أ</a:t>
@@ -9246,6 +9310,7 @@
                   <a:srgbClr val="8A6D1E"/>
                 </a:solidFill>
                 <a:latin typeface="Amiri" pitchFamily="2" charset="-78"/>
+                <a:ea typeface="Amiri" pitchFamily="2" charset="-78"/>
                 <a:cs typeface="Amiri" pitchFamily="2" charset="-78"/>
               </a:rPr>
               <a:t>نَمُوذَجُ الإِجَابَةِ</a:t>
@@ -9359,6 +9424,7 @@
                   <a:srgbClr val="1F2A37"/>
                 </a:solidFill>
                 <a:latin typeface="Amiri" pitchFamily="2" charset="-78"/>
+                <a:ea typeface="Amiri" pitchFamily="2" charset="-78"/>
                 <a:cs typeface="Amiri" pitchFamily="2" charset="-78"/>
               </a:rPr>
               <a:t>إِذَا سَأَلَنِي أَحَدٌ «مَنْ أَنْتَ؟» فَلَا أَسْتَطِيعُ أَنْ أُجِيبَ بِكَلِمَةٍ وَاحِدَةٍ. اسْمِي آدَمُ، وَعُمْرِي سِتَّ عَشْرَةَ سَنَةً، وَأَنَا طَالِبٌ فِي مَدْرَسَةٍ ثَانَوِيَّةٍ فِي لَنْدَنَ، لٰكِنَّ قِصَّتِي بَدَأَتْ بَعِيدًا مِنْ هُنَا، فِي أَزِقَّةِ فَاسَ القَدِيمَةِ.</a:t>
@@ -9378,6 +9444,7 @@
                   <a:srgbClr val="1F2A37"/>
                 </a:solidFill>
                 <a:latin typeface="Amiri" pitchFamily="2" charset="-78"/>
+                <a:ea typeface="Amiri" pitchFamily="2" charset="-78"/>
                 <a:cs typeface="Amiri" pitchFamily="2" charset="-78"/>
               </a:rPr>
               <a:t>وُلِدْتُ هُنَاكَ، وَجِئْنَا إِلَى بِرِيطَانِيَا عِنْدَمَا كَانَ عُمْرِي أَرْبَعَ سَنَوَاتٍ. كَانَتْ جَدَّتِي تُكَلِّمُنِي بِالدَّارِجَةِ كُلَّ مَسَاءٍ عَلَى الهَاتِفِ، فَلَمْ أَنْسَ لُغَتِي، أَمَّا أَصْدِقَائِي فِي المَدْرَسَةِ فَعَلَّمُونِي لَهْجَةَ لَنْدَنَ وَحُبَّ الكْرِيكِيتِ! وَهٰكَذَا كَبِرْتُ بِلُغَتَيْنِ وَعَادَاتٍ مِنْ عَالَمَيْنِ.</a:t>
@@ -9397,6 +9464,7 @@
                   <a:srgbClr val="1F2A37"/>
                 </a:solidFill>
                 <a:latin typeface="Amiri" pitchFamily="2" charset="-78"/>
+                <a:ea typeface="Amiri" pitchFamily="2" charset="-78"/>
                 <a:cs typeface="Amiri" pitchFamily="2" charset="-78"/>
               </a:rPr>
               <a:t>فِي الصَّيْفِ المَاضِي زُرْتُ فَاسَ لِأَوَّلِ مَرَّةٍ مُنْذُ سَنَوَاتٍ، فَشَعَرْتُ أَنِّي فِي بَيْتِي وَغَرِيبٌ فِي الوَقْتِ نَفْسِهِ؛ فَالنَّاسُ رَحَّبُوا بِي بِحَرَارَةٍ، لٰكِنَّهُمْ ضَحِكُوا مِنْ لَهْجَتِيَ الإِنْجِلِيزِيَّةِ، وَسَمَّوْنِي «الإِنْجِلِيزِيَّ» طُولَ الرِّحْلَةِ.</a:t>
@@ -9416,6 +9484,7 @@
                   <a:srgbClr val="1F2A37"/>
                 </a:solidFill>
                 <a:latin typeface="Amiri" pitchFamily="2" charset="-78"/>
+                <a:ea typeface="Amiri" pitchFamily="2" charset="-78"/>
                 <a:cs typeface="Amiri" pitchFamily="2" charset="-78"/>
               </a:rPr>
               <a:t>صَحِيحٌ أَنَّ العَيْشَ بَيْنَ ثَقَافَتَيْنِ مُرْبِكٌ أَحْيَانًا، غَيْرَ أَنَّهُ جَعَلَنِي أَكْثَرَ انْفِتَاحًا وَتَفَهُّمًا لِلْآخَرِينَ. فِي المُسْتَقْبَلِ أُرِيدُ أَنْ أَدْرُسَ العَرَبِيَّةَ فِي الجَامِعَةِ، وَلَوْ أَصْبَحْتُ مُعَلِّمًا، لَعَلَّمْتُ طُلَّابِي أَنَّ الهُوِيَّةَ جِسْرٌ لَا جِدَارٌ.</a:t>
@@ -9514,11 +9583,12 @@
               <a:buNone/>
             </a:pPr>
             <a:r>
-              <a:rPr lang="en-US" sz="950" b="1" dirty="0">
+              <a:rPr lang="ar-SA" sz="950" b="1" dirty="0">
                 <a:solidFill>
                   <a:srgbClr val="FFFFFF"/>
                 </a:solidFill>
                 <a:latin typeface="Calibri" pitchFamily="34" charset="0"/>
+                <a:ea typeface="Amiri" pitchFamily="2" charset="-78"/>
                 <a:cs typeface="Amiri" pitchFamily="2" charset="-78"/>
               </a:rPr>
               <a:t>إِذَا سَأَلَنِي … فَلَا</a:t>
@@ -9579,11 +9649,12 @@
               <a:buNone/>
             </a:pPr>
             <a:r>
-              <a:rPr lang="en-US" sz="950" b="1" dirty="0">
+              <a:rPr lang="ar-SA" sz="950" b="1" dirty="0">
                 <a:solidFill>
                   <a:srgbClr val="FFFFFF"/>
                 </a:solidFill>
                 <a:latin typeface="Calibri" pitchFamily="34" charset="0"/>
+                <a:ea typeface="Amiri" pitchFamily="2" charset="-78"/>
                 <a:cs typeface="Amiri" pitchFamily="2" charset="-78"/>
               </a:rPr>
               <a:t>كَانَتْ جَدَّتِي تُكَلِّمُنِي</a:t>
@@ -9644,11 +9715,12 @@
               <a:buNone/>
             </a:pPr>
             <a:r>
-              <a:rPr lang="en-US" sz="950" b="1" dirty="0">
+              <a:rPr lang="ar-SA" sz="950" b="1" dirty="0">
                 <a:solidFill>
                   <a:srgbClr val="FFFFFF"/>
                 </a:solidFill>
                 <a:latin typeface="Calibri" pitchFamily="34" charset="0"/>
+                <a:ea typeface="Amiri" pitchFamily="2" charset="-78"/>
                 <a:cs typeface="Amiri" pitchFamily="2" charset="-78"/>
               </a:rPr>
               <a:t>أَمَّا أَصْدِقَائِي … فَعَلَّمُونِي</a:t>
@@ -9709,11 +9781,12 @@
               <a:buNone/>
             </a:pPr>
             <a:r>
-              <a:rPr lang="en-US" sz="950" b="1" dirty="0">
+              <a:rPr lang="ar-SA" sz="950" b="1" dirty="0">
                 <a:solidFill>
                   <a:srgbClr val="FFFFFF"/>
                 </a:solidFill>
                 <a:latin typeface="Calibri" pitchFamily="34" charset="0"/>
+                <a:ea typeface="Amiri" pitchFamily="2" charset="-78"/>
                 <a:cs typeface="Amiri" pitchFamily="2" charset="-78"/>
               </a:rPr>
               <a:t>لَوْ أَصْبَحْتُ … لَعَلَّمْتُ</a:t>
@@ -9847,6 +9920,7 @@
                   <a:srgbClr val="D4AF37"/>
                 </a:solidFill>
                 <a:latin typeface="Amiri" pitchFamily="2" charset="-78"/>
+                <a:ea typeface="Amiri" pitchFamily="2" charset="-78"/>
                 <a:cs typeface="Amiri" pitchFamily="2" charset="-78"/>
               </a:rPr>
               <a:t>م</a:t>
@@ -10104,6 +10178,7 @@
                   <a:srgbClr val="8A6D1E"/>
                 </a:solidFill>
                 <a:latin typeface="Amiri" pitchFamily="2" charset="-78"/>
+                <a:ea typeface="Amiri" pitchFamily="2" charset="-78"/>
                 <a:cs typeface="Amiri" pitchFamily="2" charset="-78"/>
               </a:rPr>
               <a:t>ب</a:t>
@@ -10168,6 +10243,7 @@
                   <a:srgbClr val="1B3B6F"/>
                 </a:solidFill>
                 <a:latin typeface="Amiri" pitchFamily="2" charset="-78"/>
+                <a:ea typeface="Amiri" pitchFamily="2" charset="-78"/>
                 <a:cs typeface="Amiri" pitchFamily="2" charset="-78"/>
               </a:rPr>
               <a:t>ب</a:t>
@@ -10219,6 +10295,7 @@
                   <a:srgbClr val="8A6D1E"/>
                 </a:solidFill>
                 <a:latin typeface="Amiri" pitchFamily="2" charset="-78"/>
+                <a:ea typeface="Amiri" pitchFamily="2" charset="-78"/>
                 <a:cs typeface="Amiri" pitchFamily="2" charset="-78"/>
               </a:rPr>
               <a:t>نَمُوذَجُ الإِجَابَةِ</a:t>
@@ -10332,6 +10409,7 @@
                   <a:srgbClr val="1F2A37"/>
                 </a:solidFill>
                 <a:latin typeface="Amiri" pitchFamily="2" charset="-78"/>
+                <a:ea typeface="Amiri" pitchFamily="2" charset="-78"/>
                 <a:cs typeface="Amiri" pitchFamily="2" charset="-78"/>
               </a:rPr>
               <a:t>يَعِيشُ مَلَايِينُ الشَّبَابِ اليَوْمَ بَيْنَ ثَقَافَتَيْنِ؛ فَهُمْ يَتَكَلَّمُونَ لُغَةً فِي البَيْتِ، وَلُغَةً أُخْرَى فِي المَدْرَسَةِ، وَيَحْتَفِلُونَ بِأَعْيَادٍ مِنْ ثَقَافَتَيْنِ مُخْتَلِفَتَيْنِ. وَيَسْأَلُ كَثِيرٌ مِنْهُمْ: إِلَى أَيِّ مَكَانٍ أَنْتَمِي؟</a:t>
@@ -10351,6 +10429,7 @@
                   <a:srgbClr val="1F2A37"/>
                 </a:solidFill>
                 <a:latin typeface="Amiri" pitchFamily="2" charset="-78"/>
+                <a:ea typeface="Amiri" pitchFamily="2" charset="-78"/>
                 <a:cs typeface="Amiri" pitchFamily="2" charset="-78"/>
               </a:rPr>
               <a:t>فِي المَاضِي كَانَ النَّاسُ يَقْضُونَ حَيَاتَهُمْ كُلَّهَا فِي المَدِينَةِ الَّتِي وُلِدُوا فِيهَا، فَكَانَتْ هُوِيَّتُهُمْ وَاضِحَةً، أَمَّا اليَوْمَ فَتَنْتَقِلُ الأُسَرُ بَيْنَ البُلْدَانِ، وَيَكْبُرُ الأَطْفَالُ وَهُمْ يَحْمِلُونَ أَكْثَرَ مِنْ ثَقَافَةٍ، وَأَحْيَانًا أَكْثَرَ مِنْ جَوَازِ سَفَرٍ.</a:t>
@@ -10370,6 +10449,7 @@
                   <a:srgbClr val="1F2A37"/>
                 </a:solidFill>
                 <a:latin typeface="Amiri" pitchFamily="2" charset="-78"/>
+                <a:ea typeface="Amiri" pitchFamily="2" charset="-78"/>
                 <a:cs typeface="Amiri" pitchFamily="2" charset="-78"/>
               </a:rPr>
               <a:t>أَنَا مِثَالٌ عَلَى ذٰلِكَ؛ وُلِدْتُ فِي بِرِيطَانِيَا لِأَبٍ مِصْرِيٍّ وَأُمٍّ بَاكِسْتَانِيَّةٍ. فِي البِدَايَةِ كُنْتُ أَشْعُرُ أَنِّي لَا أَنْتَمِي إِلَى أَيِّ مَكَانٍ، لٰكِنْ عِنْدَمَا شَارَكْتُ فِي يَوْمٍ ثَقَافِيٍّ فِي مَدْرَسَتِي، وَقَدَّمْتُ أَطْبَاقًا مِنَ البَلَدَيْنِ، اكْتَشَفْتُ أَنَّ هٰذَا التَّنَوُّعَ كَنْزٌ، فَقَدْ جَاءَ عَشَرَاتُ الطُّلَّابِ يَسْأَلُونَ عَنْ بَلَدَيَّ وَعَادَاتِهِمَا.</a:t>
@@ -10389,6 +10469,7 @@
                   <a:srgbClr val="1F2A37"/>
                 </a:solidFill>
                 <a:latin typeface="Amiri" pitchFamily="2" charset="-78"/>
+                <a:ea typeface="Amiri" pitchFamily="2" charset="-78"/>
                 <a:cs typeface="Amiri" pitchFamily="2" charset="-78"/>
               </a:rPr>
               <a:t>صَحِيحٌ أَنَّ الهُوِيَّةَ المُزْدَوِجَةَ قَدْ تُسَبِّبُ حَيْرَةً، غَيْرَ أَنَّهَا تَفْتَحُ أَبْوَابًا كَثِيرَةً لِلتَّعَلُّمِ وَالصَّدَاقَةِ. وَلَوْ تَعَلَّمَ كُلُّ طَالِبٍ شَيْئًا عَنْ ثَقَافَاتِ زُمَلَائِهِ، لَأَصْبَحَتْ مَدَارِسُنَا أَكْثَرَ احْتِرَامًا وَتَفَاهُمًا.</a:t>
@@ -10487,11 +10568,12 @@
               <a:buNone/>
             </a:pPr>
             <a:r>
-              <a:rPr lang="en-US" sz="950" b="1" dirty="0">
+              <a:rPr lang="ar-SA" sz="950" b="1" dirty="0">
                 <a:solidFill>
                   <a:srgbClr val="FFFFFF"/>
                 </a:solidFill>
                 <a:latin typeface="Calibri" pitchFamily="34" charset="0"/>
+                <a:ea typeface="Amiri" pitchFamily="2" charset="-78"/>
                 <a:cs typeface="Amiri" pitchFamily="2" charset="-78"/>
               </a:rPr>
               <a:t>يَتَكَلَّمُونَ لُغَةً … وَلُغَةً أُخْرَى</a:t>
@@ -10552,11 +10634,12 @@
               <a:buNone/>
             </a:pPr>
             <a:r>
-              <a:rPr lang="en-US" sz="950" b="1" dirty="0">
+              <a:rPr lang="ar-SA" sz="950" b="1" dirty="0">
                 <a:solidFill>
                   <a:srgbClr val="FFFFFF"/>
                 </a:solidFill>
                 <a:latin typeface="Calibri" pitchFamily="34" charset="0"/>
+                <a:ea typeface="Amiri" pitchFamily="2" charset="-78"/>
                 <a:cs typeface="Amiri" pitchFamily="2" charset="-78"/>
               </a:rPr>
               <a:t>أَمَّا اليَوْمَ فَتَنْتَقِلُ</a:t>
@@ -10617,11 +10700,12 @@
               <a:buNone/>
             </a:pPr>
             <a:r>
-              <a:rPr lang="en-US" sz="950" b="1" dirty="0">
+              <a:rPr lang="ar-SA" sz="950" b="1" dirty="0">
                 <a:solidFill>
                   <a:srgbClr val="FFFFFF"/>
                 </a:solidFill>
                 <a:latin typeface="Calibri" pitchFamily="34" charset="0"/>
+                <a:ea typeface="Amiri" pitchFamily="2" charset="-78"/>
                 <a:cs typeface="Amiri" pitchFamily="2" charset="-78"/>
               </a:rPr>
               <a:t>وُلِدْتُ … لِأَبٍ مِصْرِيٍّ وَأُمٍّ</a:t>
@@ -10682,11 +10766,12 @@
               <a:buNone/>
             </a:pPr>
             <a:r>
-              <a:rPr lang="en-US" sz="950" b="1" dirty="0">
+              <a:rPr lang="ar-SA" sz="950" b="1" dirty="0">
                 <a:solidFill>
                   <a:srgbClr val="FFFFFF"/>
                 </a:solidFill>
                 <a:latin typeface="Calibri" pitchFamily="34" charset="0"/>
+                <a:ea typeface="Amiri" pitchFamily="2" charset="-78"/>
                 <a:cs typeface="Amiri" pitchFamily="2" charset="-78"/>
               </a:rPr>
               <a:t>لَوْ تَعَلَّمَ … لَأَصْبَحَتْ</a:t>
@@ -10820,6 +10905,7 @@
                   <a:srgbClr val="D4AF37"/>
                 </a:solidFill>
                 <a:latin typeface="Amiri" pitchFamily="2" charset="-78"/>
+                <a:ea typeface="Amiri" pitchFamily="2" charset="-78"/>
                 <a:cs typeface="Amiri" pitchFamily="2" charset="-78"/>
               </a:rPr>
               <a:t>م</a:t>
@@ -11140,6 +11226,7 @@
                   <a:srgbClr val="8A6D1E"/>
                 </a:solidFill>
                 <a:latin typeface="Amiri" pitchFamily="2" charset="-78"/>
+                <a:ea typeface="Amiri" pitchFamily="2" charset="-78"/>
                 <a:cs typeface="Amiri" pitchFamily="2" charset="-78"/>
               </a:rPr>
               <a:t>قَيِّمْ عَمَلَكَ</a:t>
@@ -12384,6 +12471,7 @@
                   <a:srgbClr val="FFFFFF"/>
                 </a:solidFill>
                 <a:latin typeface="Amiri" pitchFamily="2" charset="-78"/>
+                <a:ea typeface="Amiri" pitchFamily="2" charset="-78"/>
                 <a:cs typeface="Amiri" pitchFamily="2" charset="-78"/>
               </a:rPr>
               <a:t>أَحْسَنْتُمْ! إِلَى اللِّقَاءِ</a:t>
@@ -12536,6 +12624,7 @@
                   <a:srgbClr val="D4AF37"/>
                 </a:solidFill>
                 <a:latin typeface="Amiri" pitchFamily="2" charset="-78"/>
+                <a:ea typeface="Amiri" pitchFamily="2" charset="-78"/>
                 <a:cs typeface="Amiri" pitchFamily="2" charset="-78"/>
               </a:rPr>
               <a:t>وَرْشَةُ التَّدْرِيبِ</a:t>
@@ -12669,6 +12758,7 @@
                   <a:srgbClr val="D4AF37"/>
                 </a:solidFill>
                 <a:latin typeface="Amiri" pitchFamily="2" charset="-78"/>
+                <a:ea typeface="Amiri" pitchFamily="2" charset="-78"/>
                 <a:cs typeface="Amiri" pitchFamily="2" charset="-78"/>
               </a:rPr>
               <a:t>م</a:t>
@@ -12989,6 +13079,7 @@
                   <a:srgbClr val="8A6D1E"/>
                 </a:solidFill>
                 <a:latin typeface="Amiri" pitchFamily="2" charset="-78"/>
+                <a:ea typeface="Amiri" pitchFamily="2" charset="-78"/>
                 <a:cs typeface="Amiri" pitchFamily="2" charset="-78"/>
               </a:rPr>
               <a:t>آدَابُ الصَّفِّ</a:t>
@@ -14520,6 +14611,7 @@
                   <a:srgbClr val="D4AF37"/>
                 </a:solidFill>
                 <a:latin typeface="Amiri" pitchFamily="2" charset="-78"/>
+                <a:ea typeface="Amiri" pitchFamily="2" charset="-78"/>
                 <a:cs typeface="Amiri" pitchFamily="2" charset="-78"/>
               </a:rPr>
               <a:t>م</a:t>
@@ -14840,6 +14932,7 @@
                   <a:srgbClr val="8A6D1E"/>
                 </a:solidFill>
                 <a:latin typeface="Amiri" pitchFamily="2" charset="-78"/>
+                <a:ea typeface="Amiri" pitchFamily="2" charset="-78"/>
                 <a:cs typeface="Amiri" pitchFamily="2" charset="-78"/>
               </a:rPr>
               <a:t>خَرِيطَةُ الوَرْشَةِ</a:t>
@@ -15154,6 +15247,7 @@
                   <a:srgbClr val="1B3B6F"/>
                 </a:solidFill>
                 <a:latin typeface="Amiri" pitchFamily="2" charset="-78"/>
+                <a:ea typeface="Amiri" pitchFamily="2" charset="-78"/>
                 <a:cs typeface="Amiri" pitchFamily="2" charset="-78"/>
               </a:rPr>
               <a:t>كَيْفَ</a:t>
@@ -15430,6 +15524,7 @@
                   <a:srgbClr val="1E6B52"/>
                 </a:solidFill>
                 <a:latin typeface="Amiri" pitchFamily="2" charset="-78"/>
+                <a:ea typeface="Amiri" pitchFamily="2" charset="-78"/>
                 <a:cs typeface="Amiri" pitchFamily="2" charset="-78"/>
               </a:rPr>
               <a:t>الاسْتِمَارَةُ</a:t>
@@ -15706,6 +15801,7 @@
                   <a:srgbClr val="1E6B52"/>
                 </a:solidFill>
                 <a:latin typeface="Amiri" pitchFamily="2" charset="-78"/>
+                <a:ea typeface="Amiri" pitchFamily="2" charset="-78"/>
                 <a:cs typeface="Amiri" pitchFamily="2" charset="-78"/>
               </a:rPr>
               <a:t>الرِّسَالَةُ</a:t>
@@ -15982,6 +16078,7 @@
                   <a:srgbClr val="1E6B52"/>
                 </a:solidFill>
                 <a:latin typeface="Amiri" pitchFamily="2" charset="-78"/>
+                <a:ea typeface="Amiri" pitchFamily="2" charset="-78"/>
                 <a:cs typeface="Amiri" pitchFamily="2" charset="-78"/>
               </a:rPr>
               <a:t>المَقَالُ</a:t>
@@ -16258,6 +16355,7 @@
                   <a:srgbClr val="8A6D1E"/>
                 </a:solidFill>
                 <a:latin typeface="Amiri" pitchFamily="2" charset="-78"/>
+                <a:ea typeface="Amiri" pitchFamily="2" charset="-78"/>
                 <a:cs typeface="Amiri" pitchFamily="2" charset="-78"/>
               </a:rPr>
               <a:t>قَيِّمْ</a:t>
@@ -16501,6 +16599,7 @@
                   <a:srgbClr val="D4AF37"/>
                 </a:solidFill>
                 <a:latin typeface="Amiri" pitchFamily="2" charset="-78"/>
+                <a:ea typeface="Amiri" pitchFamily="2" charset="-78"/>
                 <a:cs typeface="Amiri" pitchFamily="2" charset="-78"/>
               </a:rPr>
               <a:t>م</a:t>
@@ -16821,6 +16920,7 @@
                   <a:srgbClr val="8A6D1E"/>
                 </a:solidFill>
                 <a:latin typeface="Amiri" pitchFamily="2" charset="-78"/>
+                <a:ea typeface="Amiri" pitchFamily="2" charset="-78"/>
                 <a:cs typeface="Amiri" pitchFamily="2" charset="-78"/>
               </a:rPr>
               <a:t>امْتِحَانُ الكِتَابَةِ</a:t>
@@ -17445,6 +17545,7 @@
                   <a:srgbClr val="1B3B6F"/>
                 </a:solidFill>
                 <a:latin typeface="Amiri" pitchFamily="2" charset="-78"/>
+                <a:ea typeface="Amiri" pitchFamily="2" charset="-78"/>
                 <a:cs typeface="Amiri" pitchFamily="2" charset="-78"/>
               </a:rPr>
               <a:t>وُلِدْتُ فِي … وَجِئْنَا إِلَى … عِنْدَمَا …</a:t>
@@ -17544,6 +17645,7 @@
                   <a:srgbClr val="1B3B6F"/>
                 </a:solidFill>
                 <a:latin typeface="Amiri" pitchFamily="2" charset="-78"/>
+                <a:ea typeface="Amiri" pitchFamily="2" charset="-78"/>
                 <a:cs typeface="Amiri" pitchFamily="2" charset="-78"/>
               </a:rPr>
               <a:t>أَشْعُرُ أَنِّي بِرِيطَانِيَّةٌ وَصُومَالِيَّةٌ مَعًا</a:t>
@@ -17643,6 +17745,7 @@
                   <a:srgbClr val="1B3B6F"/>
                 </a:solidFill>
                 <a:latin typeface="Amiri" pitchFamily="2" charset="-78"/>
+                <a:ea typeface="Amiri" pitchFamily="2" charset="-78"/>
                 <a:cs typeface="Amiri" pitchFamily="2" charset="-78"/>
               </a:rPr>
               <a:t>يَقُولُ أَصْدِقَائِي إِنِّي …</a:t>
@@ -17814,6 +17917,7 @@
                   <a:srgbClr val="D4AF37"/>
                 </a:solidFill>
                 <a:latin typeface="Amiri" pitchFamily="2" charset="-78"/>
+                <a:ea typeface="Amiri" pitchFamily="2" charset="-78"/>
                 <a:cs typeface="Amiri" pitchFamily="2" charset="-78"/>
               </a:rPr>
               <a:t>م</a:t>
@@ -18134,6 +18238,7 @@
                   <a:srgbClr val="8A6D1E"/>
                 </a:solidFill>
                 <a:latin typeface="Amiri" pitchFamily="2" charset="-78"/>
+                <a:ea typeface="Amiri" pitchFamily="2" charset="-78"/>
                 <a:cs typeface="Amiri" pitchFamily="2" charset="-78"/>
               </a:rPr>
               <a:t>التَّسْجِيلُ فِي الدَّوْرَةِ الصَّيْفِيَّةِ</a:t>
@@ -18490,6 +18595,7 @@
                   <a:srgbClr val="1B3B6F"/>
                 </a:solidFill>
                 <a:latin typeface="Amiri" pitchFamily="2" charset="-78"/>
+                <a:ea typeface="Amiri" pitchFamily="2" charset="-78"/>
                 <a:cs typeface="Amiri" pitchFamily="2" charset="-78"/>
               </a:rPr>
               <a:t>الاسْمُ الأَوَّلُ وَاسْمُ العَائِلَةِ</a:t>
@@ -18734,6 +18840,7 @@
                   <a:srgbClr val="1B3B6F"/>
                 </a:solidFill>
                 <a:latin typeface="Amiri" pitchFamily="2" charset="-78"/>
+                <a:ea typeface="Amiri" pitchFamily="2" charset="-78"/>
                 <a:cs typeface="Amiri" pitchFamily="2" charset="-78"/>
               </a:rPr>
               <a:t>العُمْرُ</a:t>
@@ -18978,6 +19085,7 @@
                   <a:srgbClr val="1B3B6F"/>
                 </a:solidFill>
                 <a:latin typeface="Amiri" pitchFamily="2" charset="-78"/>
+                <a:ea typeface="Amiri" pitchFamily="2" charset="-78"/>
                 <a:cs typeface="Amiri" pitchFamily="2" charset="-78"/>
               </a:rPr>
               <a:t>تَارِيخُ المِيلَادِ</a:t>
@@ -19222,6 +19330,7 @@
                   <a:srgbClr val="1B3B6F"/>
                 </a:solidFill>
                 <a:latin typeface="Amiri" pitchFamily="2" charset="-78"/>
+                <a:ea typeface="Amiri" pitchFamily="2" charset="-78"/>
                 <a:cs typeface="Amiri" pitchFamily="2" charset="-78"/>
               </a:rPr>
               <a:t>مَكَانُ المِيلَادِ</a:t>
@@ -19466,6 +19575,7 @@
                   <a:srgbClr val="1B3B6F"/>
                 </a:solidFill>
                 <a:latin typeface="Amiri" pitchFamily="2" charset="-78"/>
+                <a:ea typeface="Amiri" pitchFamily="2" charset="-78"/>
                 <a:cs typeface="Amiri" pitchFamily="2" charset="-78"/>
               </a:rPr>
               <a:t>الجِنْسِيَّةُ</a:t>
@@ -19710,6 +19820,7 @@
                   <a:srgbClr val="1B3B6F"/>
                 </a:solidFill>
                 <a:latin typeface="Amiri" pitchFamily="2" charset="-78"/>
+                <a:ea typeface="Amiri" pitchFamily="2" charset="-78"/>
                 <a:cs typeface="Amiri" pitchFamily="2" charset="-78"/>
               </a:rPr>
               <a:t>اللُّغَاتُ الَّتِي تَتَكَلَّمُهَا</a:t>
@@ -19954,6 +20065,7 @@
                   <a:srgbClr val="1B3B6F"/>
                 </a:solidFill>
                 <a:latin typeface="Amiri" pitchFamily="2" charset="-78"/>
+                <a:ea typeface="Amiri" pitchFamily="2" charset="-78"/>
                 <a:cs typeface="Amiri" pitchFamily="2" charset="-78"/>
               </a:rPr>
               <a:t>صِفَتَانِ تَصِفَانِكَ</a:t>
@@ -20133,6 +20245,7 @@
                   <a:srgbClr val="1B3B6F"/>
                 </a:solidFill>
                 <a:latin typeface="Amiri" pitchFamily="2" charset="-78"/>
+                <a:ea typeface="Amiri" pitchFamily="2" charset="-78"/>
                 <a:cs typeface="Amiri" pitchFamily="2" charset="-78"/>
               </a:rPr>
               <a:t>جُمْلَةٌ: لِمَاذَا تَتَعَلَّمُ العَرَبِيَّةَ؟</a:t>
@@ -20342,6 +20455,7 @@
                   <a:srgbClr val="D4AF37"/>
                 </a:solidFill>
                 <a:latin typeface="Amiri" pitchFamily="2" charset="-78"/>
+                <a:ea typeface="Amiri" pitchFamily="2" charset="-78"/>
                 <a:cs typeface="Amiri" pitchFamily="2" charset="-78"/>
               </a:rPr>
               <a:t>م</a:t>
@@ -20662,6 +20776,7 @@
                   <a:srgbClr val="8A6D1E"/>
                 </a:solidFill>
                 <a:latin typeface="Amiri" pitchFamily="2" charset="-78"/>
+                <a:ea typeface="Amiri" pitchFamily="2" charset="-78"/>
                 <a:cs typeface="Amiri" pitchFamily="2" charset="-78"/>
               </a:rPr>
               <a:t>نَمُوذَجُ الإِجَابَةِ</a:t>
@@ -20980,6 +21095,7 @@
                   <a:srgbClr val="1B3B6F"/>
                 </a:solidFill>
                 <a:latin typeface="Amiri" pitchFamily="2" charset="-78"/>
+                <a:ea typeface="Amiri" pitchFamily="2" charset="-78"/>
                 <a:cs typeface="Amiri" pitchFamily="2" charset="-78"/>
               </a:rPr>
               <a:t>مَرْيَمُ حَسَنٌ</a:t>
@@ -21018,6 +21134,7 @@
                   <a:srgbClr val="1B3B6F"/>
                 </a:solidFill>
                 <a:latin typeface="Amiri" pitchFamily="2" charset="-78"/>
+                <a:ea typeface="Amiri" pitchFamily="2" charset="-78"/>
                 <a:cs typeface="Amiri" pitchFamily="2" charset="-78"/>
               </a:rPr>
               <a:t>الاسْمُ الأَوَّلُ وَاسْمُ العَائِلَةِ</a:t>
@@ -21159,6 +21276,7 @@
                   <a:srgbClr val="1B3B6F"/>
                 </a:solidFill>
                 <a:latin typeface="Amiri" pitchFamily="2" charset="-78"/>
+                <a:ea typeface="Amiri" pitchFamily="2" charset="-78"/>
                 <a:cs typeface="Amiri" pitchFamily="2" charset="-78"/>
               </a:rPr>
               <a:t>خَمْسَ عَشْرَةَ سَنَةً</a:t>
@@ -21197,6 +21315,7 @@
                   <a:srgbClr val="1B3B6F"/>
                 </a:solidFill>
                 <a:latin typeface="Amiri" pitchFamily="2" charset="-78"/>
+                <a:ea typeface="Amiri" pitchFamily="2" charset="-78"/>
                 <a:cs typeface="Amiri" pitchFamily="2" charset="-78"/>
               </a:rPr>
               <a:t>العُمْرُ</a:t>
@@ -21338,6 +21457,7 @@
                   <a:srgbClr val="1B3B6F"/>
                 </a:solidFill>
                 <a:latin typeface="Amiri" pitchFamily="2" charset="-78"/>
+                <a:ea typeface="Amiri" pitchFamily="2" charset="-78"/>
                 <a:cs typeface="Amiri" pitchFamily="2" charset="-78"/>
               </a:rPr>
               <a:t>الخَامِسُ مِنْ يُونْيُو</a:t>
@@ -21376,6 +21496,7 @@
                   <a:srgbClr val="1B3B6F"/>
                 </a:solidFill>
                 <a:latin typeface="Amiri" pitchFamily="2" charset="-78"/>
+                <a:ea typeface="Amiri" pitchFamily="2" charset="-78"/>
                 <a:cs typeface="Amiri" pitchFamily="2" charset="-78"/>
               </a:rPr>
               <a:t>تَارِيخُ المِيلَادِ</a:t>
@@ -21517,6 +21638,7 @@
                   <a:srgbClr val="1B3B6F"/>
                 </a:solidFill>
                 <a:latin typeface="Amiri" pitchFamily="2" charset="-78"/>
+                <a:ea typeface="Amiri" pitchFamily="2" charset="-78"/>
                 <a:cs typeface="Amiri" pitchFamily="2" charset="-78"/>
               </a:rPr>
               <a:t>مُقَدِيشُو</a:t>
@@ -21555,6 +21677,7 @@
                   <a:srgbClr val="1B3B6F"/>
                 </a:solidFill>
                 <a:latin typeface="Amiri" pitchFamily="2" charset="-78"/>
+                <a:ea typeface="Amiri" pitchFamily="2" charset="-78"/>
                 <a:cs typeface="Amiri" pitchFamily="2" charset="-78"/>
               </a:rPr>
               <a:t>مَكَانُ المِيلَادِ</a:t>
@@ -21696,6 +21819,7 @@
                   <a:srgbClr val="1B3B6F"/>
                 </a:solidFill>
                 <a:latin typeface="Amiri" pitchFamily="2" charset="-78"/>
+                <a:ea typeface="Amiri" pitchFamily="2" charset="-78"/>
                 <a:cs typeface="Amiri" pitchFamily="2" charset="-78"/>
               </a:rPr>
               <a:t>بِرِيطَانِيَّةٌ</a:t>
@@ -21734,6 +21858,7 @@
                   <a:srgbClr val="1B3B6F"/>
                 </a:solidFill>
                 <a:latin typeface="Amiri" pitchFamily="2" charset="-78"/>
+                <a:ea typeface="Amiri" pitchFamily="2" charset="-78"/>
                 <a:cs typeface="Amiri" pitchFamily="2" charset="-78"/>
               </a:rPr>
               <a:t>الجِنْسِيَّةُ</a:t>
@@ -21875,6 +22000,7 @@
                   <a:srgbClr val="1B3B6F"/>
                 </a:solidFill>
                 <a:latin typeface="Amiri" pitchFamily="2" charset="-78"/>
+                <a:ea typeface="Amiri" pitchFamily="2" charset="-78"/>
                 <a:cs typeface="Amiri" pitchFamily="2" charset="-78"/>
               </a:rPr>
               <a:t>الإِنْجِلِيزِيَّةُ وَالصُّومَالِيَّةُ</a:t>
@@ -21913,6 +22039,7 @@
                   <a:srgbClr val="1B3B6F"/>
                 </a:solidFill>
                 <a:latin typeface="Amiri" pitchFamily="2" charset="-78"/>
+                <a:ea typeface="Amiri" pitchFamily="2" charset="-78"/>
                 <a:cs typeface="Amiri" pitchFamily="2" charset="-78"/>
               </a:rPr>
               <a:t>اللُّغَاتُ الَّتِي تَتَكَلَّمُهَا</a:t>
@@ -22054,6 +22181,7 @@
                   <a:srgbClr val="1B3B6F"/>
                 </a:solidFill>
                 <a:latin typeface="Amiri" pitchFamily="2" charset="-78"/>
+                <a:ea typeface="Amiri" pitchFamily="2" charset="-78"/>
                 <a:cs typeface="Amiri" pitchFamily="2" charset="-78"/>
               </a:rPr>
               <a:t>مَرِحَةٌ وَصَبُورَةٌ</a:t>
@@ -22092,6 +22220,7 @@
                   <a:srgbClr val="1B3B6F"/>
                 </a:solidFill>
                 <a:latin typeface="Amiri" pitchFamily="2" charset="-78"/>
+                <a:ea typeface="Amiri" pitchFamily="2" charset="-78"/>
                 <a:cs typeface="Amiri" pitchFamily="2" charset="-78"/>
               </a:rPr>
               <a:t>صِفَتَانِ تَصِفَانِكَ</a:t>
@@ -22233,6 +22362,7 @@
                   <a:srgbClr val="1B3B6F"/>
                 </a:solidFill>
                 <a:latin typeface="Amiri" pitchFamily="2" charset="-78"/>
+                <a:ea typeface="Amiri" pitchFamily="2" charset="-78"/>
                 <a:cs typeface="Amiri" pitchFamily="2" charset="-78"/>
               </a:rPr>
               <a:t>أَتَعَلَّمُ العَرَبِيَّةَ لِكَيْ أَفْهَمَ القُرْآنَ وَأُسَافِرَ إِلَى البُلْدَانِ العَرَبِيَّةِ.</a:t>
@@ -22271,6 +22401,7 @@
                   <a:srgbClr val="1B3B6F"/>
                 </a:solidFill>
                 <a:latin typeface="Amiri" pitchFamily="2" charset="-78"/>
+                <a:ea typeface="Amiri" pitchFamily="2" charset="-78"/>
                 <a:cs typeface="Amiri" pitchFamily="2" charset="-78"/>
               </a:rPr>
               <a:t>جُمْلَةٌ: لِمَاذَا تَتَعَلَّمُ العَرَبِيَّةَ؟</a:t>
@@ -22480,6 +22611,7 @@
                   <a:srgbClr val="D4AF37"/>
                 </a:solidFill>
                 <a:latin typeface="Amiri" pitchFamily="2" charset="-78"/>
+                <a:ea typeface="Amiri" pitchFamily="2" charset="-78"/>
                 <a:cs typeface="Amiri" pitchFamily="2" charset="-78"/>
               </a:rPr>
               <a:t>م</a:t>
@@ -22800,6 +22932,7 @@
                   <a:srgbClr val="8A6D1E"/>
                 </a:solidFill>
                 <a:latin typeface="Amiri" pitchFamily="2" charset="-78"/>
+                <a:ea typeface="Amiri" pitchFamily="2" charset="-78"/>
                 <a:cs typeface="Amiri" pitchFamily="2" charset="-78"/>
               </a:rPr>
               <a:t>رِسَالَةُ تَعَارُفٍ</a:t>
@@ -23275,6 +23408,7 @@
                   <a:srgbClr val="1B3B6F"/>
                 </a:solidFill>
                 <a:latin typeface="Amiri" pitchFamily="2" charset="-78"/>
+                <a:ea typeface="Amiri" pitchFamily="2" charset="-78"/>
                 <a:cs typeface="Amiri" pitchFamily="2" charset="-78"/>
               </a:rPr>
               <a:t>اسْمِي … وَعُمْرِي …</a:t>
@@ -23351,6 +23485,7 @@
                   <a:srgbClr val="1B3B6F"/>
                 </a:solidFill>
                 <a:latin typeface="Amiri" pitchFamily="2" charset="-78"/>
+                <a:ea typeface="Amiri" pitchFamily="2" charset="-78"/>
                 <a:cs typeface="Amiri" pitchFamily="2" charset="-78"/>
               </a:rPr>
               <a:t>أَنَا بِرِيطَانِيَّةٌ وَأَصْلِي مِنْ …</a:t>
@@ -23427,6 +23562,7 @@
                   <a:srgbClr val="1B3B6F"/>
                 </a:solidFill>
                 <a:latin typeface="Amiri" pitchFamily="2" charset="-78"/>
+                <a:ea typeface="Amiri" pitchFamily="2" charset="-78"/>
                 <a:cs typeface="Amiri" pitchFamily="2" charset="-78"/>
               </a:rPr>
               <a:t>أَتَكَلَّمُ … وَأَتَعَلَّمُ …</a:t>
@@ -23503,6 +23639,7 @@
                   <a:srgbClr val="1B3B6F"/>
                 </a:solidFill>
                 <a:latin typeface="Amiri" pitchFamily="2" charset="-78"/>
+                <a:ea typeface="Amiri" pitchFamily="2" charset="-78"/>
                 <a:cs typeface="Amiri" pitchFamily="2" charset="-78"/>
               </a:rPr>
               <a:t>يَقُولُ أَصْدِقَائِي إِنِّي …</a:t>
@@ -23674,6 +23811,7 @@
                   <a:srgbClr val="D4AF37"/>
                 </a:solidFill>
                 <a:latin typeface="Amiri" pitchFamily="2" charset="-78"/>
+                <a:ea typeface="Amiri" pitchFamily="2" charset="-78"/>
                 <a:cs typeface="Amiri" pitchFamily="2" charset="-78"/>
               </a:rPr>
               <a:t>م</a:t>
@@ -23994,6 +24132,7 @@
                   <a:srgbClr val="8A6D1E"/>
                 </a:solidFill>
                 <a:latin typeface="Amiri" pitchFamily="2" charset="-78"/>
+                <a:ea typeface="Amiri" pitchFamily="2" charset="-78"/>
                 <a:cs typeface="Amiri" pitchFamily="2" charset="-78"/>
               </a:rPr>
               <a:t>نَصُّ السُّؤَالِ</a:t>
@@ -24274,6 +24413,7 @@
                   <a:srgbClr val="1B3B6F"/>
                 </a:solidFill>
                 <a:latin typeface="Amiri" pitchFamily="2" charset="-78"/>
+                <a:ea typeface="Amiri" pitchFamily="2" charset="-78"/>
                 <a:cs typeface="Amiri" pitchFamily="2" charset="-78"/>
               </a:rPr>
               <a:t>عِنْدَكِ صَدِيقَةٌ جَدِيدَةٌ بِالمُرَاسَلَةِ. اكْتُبِي لَهَا رِسَالَةً (٨٠–٩٠ كَلِمَةً).</a:t>
@@ -24415,6 +24555,7 @@
                   <a:srgbClr val="1B3B6F"/>
                 </a:solidFill>
                 <a:latin typeface="Amiri" pitchFamily="2" charset="-78"/>
+                <a:ea typeface="Amiri" pitchFamily="2" charset="-78"/>
                 <a:cs typeface="Amiri" pitchFamily="2" charset="-78"/>
               </a:rPr>
               <a:t>مَا اسْمُكِ؟ وَكَمْ عُمْرُكِ؟ وَمَتَى عِيدُ مِيلَادِكِ؟</a:t>
@@ -24556,6 +24697,7 @@
                   <a:srgbClr val="1B3B6F"/>
                 </a:solidFill>
                 <a:latin typeface="Amiri" pitchFamily="2" charset="-78"/>
+                <a:ea typeface="Amiri" pitchFamily="2" charset="-78"/>
                 <a:cs typeface="Amiri" pitchFamily="2" charset="-78"/>
               </a:rPr>
               <a:t>أَيْنَ تَسْكُنِينَ؟ وَمَا جِنْسِيَّتُكِ؟</a:t>
@@ -24697,6 +24839,7 @@
                   <a:srgbClr val="1B3B6F"/>
                 </a:solidFill>
                 <a:latin typeface="Amiri" pitchFamily="2" charset="-78"/>
+                <a:ea typeface="Amiri" pitchFamily="2" charset="-78"/>
                 <a:cs typeface="Amiri" pitchFamily="2" charset="-78"/>
               </a:rPr>
               <a:t>أَيَّ لُغَاتٍ تَتَكَلَّمِينَ؟</a:t>
@@ -24838,6 +24981,7 @@
                   <a:srgbClr val="1B3B6F"/>
                 </a:solidFill>
                 <a:latin typeface="Amiri" pitchFamily="2" charset="-78"/>
+                <a:ea typeface="Amiri" pitchFamily="2" charset="-78"/>
                 <a:cs typeface="Amiri" pitchFamily="2" charset="-78"/>
               </a:rPr>
               <a:t>صِفِي شَخْصِيَّتَكِ. وَمَتَى سَتَلْتَقِيَانِ؟</a:t>
@@ -25047,6 +25191,7 @@
                   <a:srgbClr val="D4AF37"/>
                 </a:solidFill>
                 <a:latin typeface="Amiri" pitchFamily="2" charset="-78"/>
+                <a:ea typeface="Amiri" pitchFamily="2" charset="-78"/>
                 <a:cs typeface="Amiri" pitchFamily="2" charset="-78"/>
               </a:rPr>
               <a:t>م</a:t>
@@ -25367,6 +25512,7 @@
                   <a:srgbClr val="8A6D1E"/>
                 </a:solidFill>
                 <a:latin typeface="Amiri" pitchFamily="2" charset="-78"/>
+                <a:ea typeface="Amiri" pitchFamily="2" charset="-78"/>
                 <a:cs typeface="Amiri" pitchFamily="2" charset="-78"/>
               </a:rPr>
               <a:t>قَوَالِبُ الكِتَابَةِ</a:t>
@@ -25647,6 +25793,7 @@
                   <a:srgbClr val="1B3B6F"/>
                 </a:solidFill>
                 <a:latin typeface="Amiri" pitchFamily="2" charset="-78"/>
+                <a:ea typeface="Amiri" pitchFamily="2" charset="-78"/>
                 <a:cs typeface="Amiri" pitchFamily="2" charset="-78"/>
               </a:rPr>
               <a:t>مَرْحَبًا يَا ______ ،</a:t>
@@ -25853,6 +26000,7 @@
                   <a:srgbClr val="1B3B6F"/>
                 </a:solidFill>
                 <a:latin typeface="Amiri" pitchFamily="2" charset="-78"/>
+                <a:ea typeface="Amiri" pitchFamily="2" charset="-78"/>
                 <a:cs typeface="Amiri" pitchFamily="2" charset="-78"/>
               </a:rPr>
               <a:t>اسْمِي ______ ، وَعُمْرِي ______ . عِيدُ مِيلَادِي فِي ______ .</a:t>
@@ -26059,6 +26207,7 @@
                   <a:srgbClr val="1B3B6F"/>
                 </a:solidFill>
                 <a:latin typeface="Amiri" pitchFamily="2" charset="-78"/>
+                <a:ea typeface="Amiri" pitchFamily="2" charset="-78"/>
                 <a:cs typeface="Amiri" pitchFamily="2" charset="-78"/>
               </a:rPr>
               <a:t>أَسْكُنُ فِي ______ . أَنَا ______ ، وَأَصْلِي مِنْ ______ .</a:t>
@@ -26265,6 +26414,7 @@
                   <a:srgbClr val="1B3B6F"/>
                 </a:solidFill>
                 <a:latin typeface="Amiri" pitchFamily="2" charset="-78"/>
+                <a:ea typeface="Amiri" pitchFamily="2" charset="-78"/>
                 <a:cs typeface="Amiri" pitchFamily="2" charset="-78"/>
               </a:rPr>
               <a:t>أَتَكَلَّمُ ______ وَ ______ .</a:t>
@@ -26471,6 +26621,7 @@
                   <a:srgbClr val="1B3B6F"/>
                 </a:solidFill>
                 <a:latin typeface="Amiri" pitchFamily="2" charset="-78"/>
+                <a:ea typeface="Amiri" pitchFamily="2" charset="-78"/>
                 <a:cs typeface="Amiri" pitchFamily="2" charset="-78"/>
               </a:rPr>
               <a:t>أَنَا ______ وَ ______ . فِي المُسْتَقْبَلِ سَأَزُورُكِ فِي ______ .</a:t>
@@ -26677,6 +26828,7 @@
                   <a:srgbClr val="1B3B6F"/>
                 </a:solidFill>
                 <a:latin typeface="Amiri" pitchFamily="2" charset="-78"/>
+                <a:ea typeface="Amiri" pitchFamily="2" charset="-78"/>
                 <a:cs typeface="Amiri" pitchFamily="2" charset="-78"/>
               </a:rPr>
               <a:t>مَعَ السَّلَامَةِ، ______</a:t>
@@ -26916,13 +27068,9 @@
     <a:fontScheme name="Office">
       <a:majorFont>
         <a:latin typeface="Calibri Light" panose="020F0302020204030204"/>
-        <a:ea typeface=""/>
-        <a:cs typeface=""/>
-        <a:font script="Jpan" typeface="游ゴシック Light"/>
-        <a:font script="Hang" typeface="맑은 고딕"/>
-        <a:font script="Hans" typeface="等线 Light"/>
-        <a:font script="Hant" typeface="新細明體"/>
-        <a:font script="Arab" typeface="Times New Roman"/>
+        <a:ea typeface="Amiri" pitchFamily="2" charset="-78"/>
+        <a:cs typeface="Amiri" pitchFamily="2" charset="-78"/>
+        <a:font script="Arab" typeface="Amiri"/>
         <a:font script="Hebr" typeface="Times New Roman"/>
         <a:font script="Thai" typeface="Angsana New"/>
         <a:font script="Ethi" typeface="Nyala"/>
@@ -26968,13 +27116,9 @@
       </a:majorFont>
       <a:minorFont>
         <a:latin typeface="Calibri" panose="020F0502020204030204"/>
-        <a:ea typeface=""/>
-        <a:cs typeface=""/>
-        <a:font script="Jpan" typeface="游ゴシック"/>
-        <a:font script="Hang" typeface="맑은 고딕"/>
-        <a:font script="Hans" typeface="等线"/>
-        <a:font script="Hant" typeface="新細明體"/>
-        <a:font script="Arab" typeface="Arial"/>
+        <a:ea typeface="Amiri" pitchFamily="2" charset="-78"/>
+        <a:cs typeface="Amiri" pitchFamily="2" charset="-78"/>
+        <a:font script="Arab" typeface="Amiri"/>
         <a:font script="Hebr" typeface="Arial"/>
         <a:font script="Thai" typeface="Cordia New"/>
         <a:font script="Ethi" typeface="Nyala"/>

--- a/Topic_B/Exam_Practice/TB-L01_Writing_Workshop_Identity_and_Personal_Profiles.pptx
+++ b/Topic_B/Exam_Practice/TB-L01_Writing_Workshop_Identity_and_Personal_Profiles.pptx
@@ -3848,7 +3848,7 @@
                 <a:solidFill>
                   <a:srgbClr val="FFFFFF"/>
                 </a:solidFill>
-                <a:latin typeface="Calibri" pitchFamily="34" charset="0"/>
+                <a:latin typeface="Amiri" pitchFamily="2" charset="-78"/>
                 <a:ea typeface="Amiri" pitchFamily="2" charset="-78"/>
                 <a:cs typeface="Amiri" pitchFamily="2" charset="-78"/>
               </a:rPr>
@@ -3914,7 +3914,7 @@
                 <a:solidFill>
                   <a:srgbClr val="FFFFFF"/>
                 </a:solidFill>
-                <a:latin typeface="Calibri" pitchFamily="34" charset="0"/>
+                <a:latin typeface="Amiri" pitchFamily="2" charset="-78"/>
                 <a:ea typeface="Amiri" pitchFamily="2" charset="-78"/>
                 <a:cs typeface="Amiri" pitchFamily="2" charset="-78"/>
               </a:rPr>
@@ -3980,7 +3980,7 @@
                 <a:solidFill>
                   <a:srgbClr val="FFFFFF"/>
                 </a:solidFill>
-                <a:latin typeface="Calibri" pitchFamily="34" charset="0"/>
+                <a:latin typeface="Amiri" pitchFamily="2" charset="-78"/>
                 <a:ea typeface="Amiri" pitchFamily="2" charset="-78"/>
                 <a:cs typeface="Amiri" pitchFamily="2" charset="-78"/>
               </a:rPr>
@@ -4046,7 +4046,7 @@
                 <a:solidFill>
                   <a:srgbClr val="FFFFFF"/>
                 </a:solidFill>
-                <a:latin typeface="Calibri" pitchFamily="34" charset="0"/>
+                <a:latin typeface="Amiri" pitchFamily="2" charset="-78"/>
                 <a:ea typeface="Amiri" pitchFamily="2" charset="-78"/>
                 <a:cs typeface="Amiri" pitchFamily="2" charset="-78"/>
               </a:rPr>
@@ -4844,7 +4844,7 @@
                 <a:solidFill>
                   <a:srgbClr val="FFFFFF"/>
                 </a:solidFill>
-                <a:latin typeface="Calibri" pitchFamily="34" charset="0"/>
+                <a:latin typeface="Amiri" pitchFamily="2" charset="-78"/>
                 <a:ea typeface="Amiri" pitchFamily="2" charset="-78"/>
                 <a:cs typeface="Amiri" pitchFamily="2" charset="-78"/>
               </a:rPr>
@@ -4910,7 +4910,7 @@
                 <a:solidFill>
                   <a:srgbClr val="FFFFFF"/>
                 </a:solidFill>
-                <a:latin typeface="Calibri" pitchFamily="34" charset="0"/>
+                <a:latin typeface="Amiri" pitchFamily="2" charset="-78"/>
                 <a:ea typeface="Amiri" pitchFamily="2" charset="-78"/>
                 <a:cs typeface="Amiri" pitchFamily="2" charset="-78"/>
               </a:rPr>
@@ -4976,7 +4976,7 @@
                 <a:solidFill>
                   <a:srgbClr val="FFFFFF"/>
                 </a:solidFill>
-                <a:latin typeface="Calibri" pitchFamily="34" charset="0"/>
+                <a:latin typeface="Amiri" pitchFamily="2" charset="-78"/>
                 <a:ea typeface="Amiri" pitchFamily="2" charset="-78"/>
                 <a:cs typeface="Amiri" pitchFamily="2" charset="-78"/>
               </a:rPr>
@@ -5042,7 +5042,7 @@
                 <a:solidFill>
                   <a:srgbClr val="FFFFFF"/>
                 </a:solidFill>
-                <a:latin typeface="Calibri" pitchFamily="34" charset="0"/>
+                <a:latin typeface="Amiri" pitchFamily="2" charset="-78"/>
                 <a:ea typeface="Amiri" pitchFamily="2" charset="-78"/>
                 <a:cs typeface="Amiri" pitchFamily="2" charset="-78"/>
               </a:rPr>
@@ -8602,7 +8602,7 @@
                 <a:solidFill>
                   <a:srgbClr val="FFFFFF"/>
                 </a:solidFill>
-                <a:latin typeface="Calibri" pitchFamily="34" charset="0"/>
+                <a:latin typeface="Amiri" pitchFamily="2" charset="-78"/>
                 <a:ea typeface="Amiri" pitchFamily="2" charset="-78"/>
                 <a:cs typeface="Amiri" pitchFamily="2" charset="-78"/>
               </a:rPr>
@@ -8668,7 +8668,7 @@
                 <a:solidFill>
                   <a:srgbClr val="FFFFFF"/>
                 </a:solidFill>
-                <a:latin typeface="Calibri" pitchFamily="34" charset="0"/>
+                <a:latin typeface="Amiri" pitchFamily="2" charset="-78"/>
                 <a:ea typeface="Amiri" pitchFamily="2" charset="-78"/>
                 <a:cs typeface="Amiri" pitchFamily="2" charset="-78"/>
               </a:rPr>
@@ -8734,7 +8734,7 @@
                 <a:solidFill>
                   <a:srgbClr val="FFFFFF"/>
                 </a:solidFill>
-                <a:latin typeface="Calibri" pitchFamily="34" charset="0"/>
+                <a:latin typeface="Amiri" pitchFamily="2" charset="-78"/>
                 <a:ea typeface="Amiri" pitchFamily="2" charset="-78"/>
                 <a:cs typeface="Amiri" pitchFamily="2" charset="-78"/>
               </a:rPr>
@@ -8800,7 +8800,7 @@
                 <a:solidFill>
                   <a:srgbClr val="FFFFFF"/>
                 </a:solidFill>
-                <a:latin typeface="Calibri" pitchFamily="34" charset="0"/>
+                <a:latin typeface="Amiri" pitchFamily="2" charset="-78"/>
                 <a:ea typeface="Amiri" pitchFamily="2" charset="-78"/>
                 <a:cs typeface="Amiri" pitchFamily="2" charset="-78"/>
               </a:rPr>
@@ -9587,7 +9587,7 @@
                 <a:solidFill>
                   <a:srgbClr val="FFFFFF"/>
                 </a:solidFill>
-                <a:latin typeface="Calibri" pitchFamily="34" charset="0"/>
+                <a:latin typeface="Amiri" pitchFamily="2" charset="-78"/>
                 <a:ea typeface="Amiri" pitchFamily="2" charset="-78"/>
                 <a:cs typeface="Amiri" pitchFamily="2" charset="-78"/>
               </a:rPr>
@@ -9653,7 +9653,7 @@
                 <a:solidFill>
                   <a:srgbClr val="FFFFFF"/>
                 </a:solidFill>
-                <a:latin typeface="Calibri" pitchFamily="34" charset="0"/>
+                <a:latin typeface="Amiri" pitchFamily="2" charset="-78"/>
                 <a:ea typeface="Amiri" pitchFamily="2" charset="-78"/>
                 <a:cs typeface="Amiri" pitchFamily="2" charset="-78"/>
               </a:rPr>
@@ -9719,7 +9719,7 @@
                 <a:solidFill>
                   <a:srgbClr val="FFFFFF"/>
                 </a:solidFill>
-                <a:latin typeface="Calibri" pitchFamily="34" charset="0"/>
+                <a:latin typeface="Amiri" pitchFamily="2" charset="-78"/>
                 <a:ea typeface="Amiri" pitchFamily="2" charset="-78"/>
                 <a:cs typeface="Amiri" pitchFamily="2" charset="-78"/>
               </a:rPr>
@@ -9785,7 +9785,7 @@
                 <a:solidFill>
                   <a:srgbClr val="FFFFFF"/>
                 </a:solidFill>
-                <a:latin typeface="Calibri" pitchFamily="34" charset="0"/>
+                <a:latin typeface="Amiri" pitchFamily="2" charset="-78"/>
                 <a:ea typeface="Amiri" pitchFamily="2" charset="-78"/>
                 <a:cs typeface="Amiri" pitchFamily="2" charset="-78"/>
               </a:rPr>
@@ -10572,7 +10572,7 @@
                 <a:solidFill>
                   <a:srgbClr val="FFFFFF"/>
                 </a:solidFill>
-                <a:latin typeface="Calibri" pitchFamily="34" charset="0"/>
+                <a:latin typeface="Amiri" pitchFamily="2" charset="-78"/>
                 <a:ea typeface="Amiri" pitchFamily="2" charset="-78"/>
                 <a:cs typeface="Amiri" pitchFamily="2" charset="-78"/>
               </a:rPr>
@@ -10638,7 +10638,7 @@
                 <a:solidFill>
                   <a:srgbClr val="FFFFFF"/>
                 </a:solidFill>
-                <a:latin typeface="Calibri" pitchFamily="34" charset="0"/>
+                <a:latin typeface="Amiri" pitchFamily="2" charset="-78"/>
                 <a:ea typeface="Amiri" pitchFamily="2" charset="-78"/>
                 <a:cs typeface="Amiri" pitchFamily="2" charset="-78"/>
               </a:rPr>
@@ -10704,7 +10704,7 @@
                 <a:solidFill>
                   <a:srgbClr val="FFFFFF"/>
                 </a:solidFill>
-                <a:latin typeface="Calibri" pitchFamily="34" charset="0"/>
+                <a:latin typeface="Amiri" pitchFamily="2" charset="-78"/>
                 <a:ea typeface="Amiri" pitchFamily="2" charset="-78"/>
                 <a:cs typeface="Amiri" pitchFamily="2" charset="-78"/>
               </a:rPr>
@@ -10770,7 +10770,7 @@
                 <a:solidFill>
                   <a:srgbClr val="FFFFFF"/>
                 </a:solidFill>
-                <a:latin typeface="Calibri" pitchFamily="34" charset="0"/>
+                <a:latin typeface="Amiri" pitchFamily="2" charset="-78"/>
                 <a:ea typeface="Amiri" pitchFamily="2" charset="-78"/>
                 <a:cs typeface="Amiri" pitchFamily="2" charset="-78"/>
               </a:rPr>
